--- a/workshop/PRD2.2_Event_Review_Workshop.pptx
+++ b/workshop/PRD2.2_Event_Review_Workshop.pptx
@@ -2054,7 +2054,7 @@
                 <a:ea typeface="Cambria" pitchFamily="34" charset="-122"/>
                 <a:cs typeface="Cambria" pitchFamily="34" charset="-120"/>
               </a:rPr>
-              <a:t>106/106</a:t>
+              <a:t>120/120</a:t>
             </a:r>
             <a:endParaRPr lang="en-US" sz="2600" dirty="0"/>
           </a:p>
@@ -2288,7 +2288,7 @@
                 <a:ea typeface="Calibri" pitchFamily="34" charset="-122"/>
                 <a:cs typeface="Calibri" pitchFamily="34" charset="-120"/>
               </a:rPr>
-              <a:t>Workshop demo  ·  09/07/2026</a:t>
+              <a:t>Workshop demo  ·  11/07/2026</a:t>
             </a:r>
             <a:endParaRPr lang="en-US" sz="1100" dirty="0"/>
           </a:p>
@@ -2471,7 +2471,7 @@
                 <a:ea typeface="Cambria" pitchFamily="34" charset="-122"/>
                 <a:cs typeface="Cambria" pitchFamily="34" charset="-120"/>
               </a:rPr>
-              <a:t>106</a:t>
+              <a:t>120</a:t>
             </a:r>
             <a:endParaRPr lang="en-US" sz="5200" dirty="0"/>
           </a:p>
@@ -6532,7 +6532,7 @@
       </p:sp>
       <p:pic>
         <p:nvPicPr>
-          <p:cNvPr id="8" name="Image 0" descr="D:/AI/screen-watcher-pro/workshop/evidence/s03_sos_pending.png">    </p:cNvPr>
+          <p:cNvPr id="8" name="Image 0" descr="D:/AI/screen-watcher-pro/workshop/110726/evidence/s03_sos_pending.png">    </p:cNvPr>
           <p:cNvPicPr>
             <a:picLocks noChangeAspect="1"/>
           </p:cNvPicPr>
@@ -6655,7 +6655,7 @@
               <a:buNone/>
             </a:pPr>
             <a:r>
-              <a:rPr lang="en-US" sz="1050" dirty="0">
+              <a:rPr lang="en-US" sz="970" dirty="0">
                 <a:solidFill>
                   <a:srgbClr val="B9C4D6"/>
                 </a:solidFill>
@@ -6663,10 +6663,10 @@
                 <a:ea typeface="Consolas" pitchFamily="34" charset="-122"/>
                 <a:cs typeface="Consolas" pitchFamily="34" charset="-120"/>
               </a:rPr>
-              <a:t>18:57:09  sos  SOS alert created: Payment declined / fraud (INCIDENT)
+              <a:t>10:24:58  sos  SOS alert created: Payment declined / fraud (INCIDENT)
 </a:t>
             </a:r>
-            <a:endParaRPr lang="en-US" sz="1050" dirty="0"/>
+            <a:endParaRPr lang="en-US" sz="970" dirty="0"/>
           </a:p>
           <a:p>
             <a:pPr indent="0" marL="0">
@@ -6676,7 +6676,7 @@
               <a:buNone/>
             </a:pPr>
             <a:r>
-              <a:rPr lang="en-US" sz="1050" b="1" dirty="0">
+              <a:rPr lang="en-US" sz="970" b="1" dirty="0">
                 <a:solidFill>
                   <a:srgbClr val="FF6B6B"/>
                 </a:solidFill>
@@ -6687,7 +6687,7 @@
               <a:t>🚨🚨🚨 [SOS] CRITICAL — Incident rule 'payment_declined_incident'
 </a:t>
             </a:r>
-            <a:endParaRPr lang="en-US" sz="1050" dirty="0"/>
+            <a:endParaRPr lang="en-US" sz="970" dirty="0"/>
           </a:p>
           <a:p>
             <a:pPr indent="0" marL="0">
@@ -6697,7 +6697,7 @@
               <a:buNone/>
             </a:pPr>
             <a:r>
-              <a:rPr lang="en-US" sz="1050" b="1" dirty="0">
+              <a:rPr lang="en-US" sz="970" b="1" dirty="0">
                 <a:solidFill>
                   <a:srgbClr val="FF6B6B"/>
                 </a:solidFill>
@@ -6705,10 +6705,10 @@
                 <a:ea typeface="Consolas" pitchFamily="34" charset="-122"/>
                 <a:cs typeface="Consolas" pitchFamily="34" charset="-120"/>
               </a:rPr>
-              <a:t>         matched event EVT-019f46bd… @ 2026-07-09T18:57:09 🚨🚨🚨
+              <a:t>         matched event EVT-019f4f34… @ 2026-07-11T10:24:58 🚨🚨🚨
 </a:t>
             </a:r>
-            <a:endParaRPr lang="en-US" sz="1050" dirty="0"/>
+            <a:endParaRPr lang="en-US" sz="970" dirty="0"/>
           </a:p>
           <a:p>
             <a:pPr indent="0" marL="0">
@@ -6718,7 +6718,7 @@
               <a:buNone/>
             </a:pPr>
             <a:r>
-              <a:rPr lang="en-US" sz="1050" dirty="0">
+              <a:rPr lang="en-US" sz="970" dirty="0">
                 <a:solidFill>
                   <a:srgbClr val="FFD764"/>
                 </a:solidFill>
@@ -6726,10 +6726,10 @@
                 <a:ea typeface="Consolas" pitchFamily="34" charset="-122"/>
                 <a:cs typeface="Consolas" pitchFamily="34" charset="-120"/>
               </a:rPr>
-              <a:t>18:57:11  sos_job  SOS ALARM: severity=CRITICAL
+              <a:t>10:25:00  sos_job  SOS ALARM: severity=CRITICAL
 </a:t>
             </a:r>
-            <a:endParaRPr lang="en-US" sz="1050" dirty="0"/>
+            <a:endParaRPr lang="en-US" sz="970" dirty="0"/>
           </a:p>
           <a:p>
             <a:pPr indent="0" marL="0">
@@ -6739,7 +6739,7 @@
               <a:buNone/>
             </a:pPr>
             <a:r>
-              <a:rPr lang="en-US" sz="1050" i="1" dirty="0">
+              <a:rPr lang="en-US" sz="970" dirty="0">
                 <a:solidFill>
                   <a:srgbClr val="7FD39A"/>
                 </a:solidFill>
@@ -6747,10 +6747,10 @@
                 <a:ea typeface="Consolas" pitchFamily="34" charset="-122"/>
                 <a:cs typeface="Consolas" pitchFamily="34" charset="-120"/>
               </a:rPr>
-              <a:t>— 5 phút sau, CHƯA ack → TỰ RÚ LẠI —
+              <a:t>10:25:06  sos  alert acknowledged by admin  →  console DỪNG rú
 </a:t>
             </a:r>
-            <a:endParaRPr lang="en-US" sz="1050" dirty="0"/>
+            <a:endParaRPr lang="en-US" sz="970" dirty="0"/>
           </a:p>
           <a:p>
             <a:pPr indent="0" marL="0">
@@ -6760,17 +6760,38 @@
               <a:buNone/>
             </a:pPr>
             <a:r>
-              <a:rPr lang="en-US" sz="1050" dirty="0">
-                <a:solidFill>
-                  <a:srgbClr val="FFD764"/>
+              <a:rPr lang="en-US" sz="970" dirty="0">
+                <a:solidFill>
+                  <a:srgbClr val="B9C4D6"/>
                 </a:solidFill>
                 <a:latin typeface="Consolas" pitchFamily="34" charset="0"/>
                 <a:ea typeface="Consolas" pitchFamily="34" charset="-122"/>
                 <a:cs typeface="Consolas" pitchFamily="34" charset="-120"/>
               </a:rPr>
-              <a:t>19:02:14  sos_job  SOS ALARM: severity=CRITICAL</a:t>
-            </a:r>
-            <a:endParaRPr lang="en-US" sz="1050" dirty="0"/>
+              <a:t>10:25:06  sos  NEW SOS alert created (incident #2) → rú lại ngay
+</a:t>
+            </a:r>
+            <a:endParaRPr lang="en-US" sz="970" dirty="0"/>
+          </a:p>
+          <a:p>
+            <a:pPr indent="0" marL="0">
+              <a:lnSpc>
+                <a:spcPct val="100000"/>
+              </a:lnSpc>
+              <a:buNone/>
+            </a:pPr>
+            <a:r>
+              <a:rPr lang="en-US" sz="970" dirty="0">
+                <a:solidFill>
+                  <a:srgbClr val="FFD764"/>
+                </a:solidFill>
+                <a:latin typeface="Consolas" pitchFamily="34" charset="0"/>
+                <a:ea typeface="Consolas" pitchFamily="34" charset="-122"/>
+                <a:cs typeface="Consolas" pitchFamily="34" charset="-120"/>
+              </a:rPr>
+              <a:t>10:25:07  sos_job  SOS ALARM: severity=CRITICAL</a:t>
+            </a:r>
+            <a:endParaRPr lang="en-US" sz="970" dirty="0"/>
           </a:p>
         </p:txBody>
       </p:sp>
@@ -6920,7 +6941,7 @@
       </p:sp>
       <p:pic>
         <p:nvPicPr>
-          <p:cNvPr id="5" name="Image 0" descr="D:/AI/screen-watcher-pro/workshop/evidence/s02_review_queue.png">    </p:cNvPr>
+          <p:cNvPr id="5" name="Image 0" descr="D:/AI/screen-watcher-pro/workshop/110726/evidence/s02_review_queue.png">    </p:cNvPr>
           <p:cNvPicPr>
             <a:picLocks noChangeAspect="1"/>
           </p:cNvPicPr>
@@ -7682,7 +7703,7 @@
       </p:sp>
       <p:pic>
         <p:nvPicPr>
-          <p:cNvPr id="5" name="Image 0" descr="D:/AI/screen-watcher-pro/workshop/evidence/s08_rules_after.png">    </p:cNvPr>
+          <p:cNvPr id="5" name="Image 0" descr="D:/AI/screen-watcher-pro/workshop/110726/evidence/s08_rules_after.png">    </p:cNvPr>
           <p:cNvPicPr>
             <a:picLocks noChangeAspect="1"/>
           </p:cNvPicPr>
@@ -9325,7 +9346,7 @@
       </p:sp>
       <p:pic>
         <p:nvPicPr>
-          <p:cNvPr id="5" name="Image 0" descr="D:/AI/screen-watcher-pro/workshop/evidence/s09_audit_after.png">    </p:cNvPr>
+          <p:cNvPr id="5" name="Image 0" descr="D:/AI/screen-watcher-pro/workshop/110726/evidence/s09_audit_after.png">    </p:cNvPr>
           <p:cNvPicPr>
             <a:picLocks noChangeAspect="1"/>
           </p:cNvPicPr>
@@ -9339,8 +9360,8 @@
         </p:blipFill>
         <p:spPr>
           <a:xfrm>
-            <a:off x="658368" y="1784366"/>
-            <a:ext cx="6684264" cy="4386548"/>
+            <a:off x="658368" y="1998471"/>
+            <a:ext cx="6684264" cy="3958338"/>
           </a:xfrm>
           <a:prstGeom prst="rect">
             <a:avLst/>
